--- a/docs/iter_2.pptx
+++ b/docs/iter_2.pptx
@@ -4936,7 +4936,7 @@
         <p:spPr/>
         <p:txBody>
           <a:bodyPr>
-            <a:normAutofit lnSpcReduction="10000"/>
+            <a:normAutofit fontScale="92500" lnSpcReduction="20000"/>
           </a:bodyPr>
           <a:lstStyle/>
           <a:p>
@@ -4956,13 +4956,14 @@
           <a:p>
             <a:r>
               <a:rPr lang="ru-RU" sz="1600" dirty="0"/>
-              <a:t>Реализована функция </a:t>
-            </a:r>
-            <a:r>
-              <a:rPr lang="ru-RU" sz="1600"/>
-              <a:t>загрузки датасета</a:t>
-            </a:r>
-            <a:endParaRPr lang="ru-RU" sz="1600" dirty="0"/>
+              <a:t>Реализована функция загрузки датасета</a:t>
+            </a:r>
+          </a:p>
+          <a:p>
+            <a:r>
+              <a:rPr lang="ru-RU" sz="1600" dirty="0"/>
+              <a:t>Настроена база данных бля хранения информации о датасетах, статусе из разметки</a:t>
+            </a:r>
           </a:p>
           <a:p>
             <a:r>
@@ -5150,13 +5151,50 @@
           <a:lstStyle/>
           <a:p>
             <a:r>
+              <a:rPr lang="ru-RU" dirty="0"/>
+              <a:t>Доделать отправку размеченных изображений из пользовательского интерфейса</a:t>
+            </a:r>
+          </a:p>
+          <a:p>
+            <a:r>
+              <a:rPr lang="ru-RU" dirty="0"/>
+              <a:t>Добавить функционал отправки изображений на </a:t>
+            </a:r>
+            <a:r>
               <a:rPr lang="ru-RU" dirty="0" err="1"/>
-              <a:t>Додклать</a:t>
+              <a:t>авторазметку</a:t>
             </a:r>
             <a:r>
               <a:rPr lang="ru-RU" dirty="0"/>
-              <a:t> пользовательский интерфейс</a:t>
-            </a:r>
+              <a:t> в пользовательский интерфейс</a:t>
+            </a:r>
+          </a:p>
+          <a:p>
+            <a:r>
+              <a:rPr lang="ru-RU" dirty="0"/>
+              <a:t>Добавить вывод логов обучения и метрик в пользовательский интерфейс</a:t>
+            </a:r>
+          </a:p>
+          <a:p>
+            <a:r>
+              <a:rPr lang="ru-RU" dirty="0"/>
+              <a:t>Реализовать сохранение результатов разметки в файлы</a:t>
+            </a:r>
+          </a:p>
+          <a:p>
+            <a:endParaRPr lang="ru-RU" dirty="0"/>
+          </a:p>
+          <a:p>
+            <a:endParaRPr lang="ru-RU" dirty="0"/>
+          </a:p>
+          <a:p>
+            <a:endParaRPr lang="ru-RU" dirty="0"/>
+          </a:p>
+          <a:p>
+            <a:endParaRPr lang="ru-RU" dirty="0"/>
+          </a:p>
+          <a:p>
+            <a:endParaRPr lang="ru-RU" dirty="0"/>
           </a:p>
           <a:p>
             <a:endParaRPr lang="ru-RU" dirty="0"/>
